--- a/presentations/itmo_rules.pptx
+++ b/presentations/itmo_rules.pptx
@@ -5942,7 +5942,7 @@
           <a:p>
             <a:fld id="{5BCAD085-E8A6-8845-BD4E-CB4CCA059FC4}" type="datetimeFigureOut">
               <a:rPr lang="en-US" smtClean="0"/>
-              <a:t>8/31/2026</a:t>
+              <a:t>10/9/2026</a:t>
             </a:fld>
             <a:endParaRPr lang="en-US"/>
           </a:p>
@@ -6112,7 +6112,7 @@
           <a:p>
             <a:fld id="{5BCAD085-E8A6-8845-BD4E-CB4CCA059FC4}" type="datetimeFigureOut">
               <a:rPr lang="en-US" smtClean="0"/>
-              <a:t>8/31/2026</a:t>
+              <a:t>10/9/2026</a:t>
             </a:fld>
             <a:endParaRPr lang="en-US"/>
           </a:p>
@@ -6292,7 +6292,7 @@
           <a:p>
             <a:fld id="{5BCAD085-E8A6-8845-BD4E-CB4CCA059FC4}" type="datetimeFigureOut">
               <a:rPr lang="en-US" smtClean="0"/>
-              <a:t>8/31/2026</a:t>
+              <a:t>10/9/2026</a:t>
             </a:fld>
             <a:endParaRPr lang="en-US"/>
           </a:p>
@@ -6462,7 +6462,7 @@
           <a:p>
             <a:fld id="{5BCAD085-E8A6-8845-BD4E-CB4CCA059FC4}" type="datetimeFigureOut">
               <a:rPr lang="en-US" smtClean="0"/>
-              <a:t>8/31/2026</a:t>
+              <a:t>10/9/2026</a:t>
             </a:fld>
             <a:endParaRPr lang="en-US"/>
           </a:p>
@@ -6708,7 +6708,7 @@
           <a:p>
             <a:fld id="{5BCAD085-E8A6-8845-BD4E-CB4CCA059FC4}" type="datetimeFigureOut">
               <a:rPr lang="en-US" smtClean="0"/>
-              <a:t>8/31/2026</a:t>
+              <a:t>10/9/2026</a:t>
             </a:fld>
             <a:endParaRPr lang="en-US"/>
           </a:p>
@@ -6996,7 +6996,7 @@
           <a:p>
             <a:fld id="{5BCAD085-E8A6-8845-BD4E-CB4CCA059FC4}" type="datetimeFigureOut">
               <a:rPr lang="en-US" smtClean="0"/>
-              <a:t>8/31/2026</a:t>
+              <a:t>10/9/2026</a:t>
             </a:fld>
             <a:endParaRPr lang="en-US"/>
           </a:p>
@@ -7418,7 +7418,7 @@
           <a:p>
             <a:fld id="{5BCAD085-E8A6-8845-BD4E-CB4CCA059FC4}" type="datetimeFigureOut">
               <a:rPr lang="en-US" smtClean="0"/>
-              <a:t>8/31/2026</a:t>
+              <a:t>10/9/2026</a:t>
             </a:fld>
             <a:endParaRPr lang="en-US"/>
           </a:p>
@@ -7536,7 +7536,7 @@
           <a:p>
             <a:fld id="{5BCAD085-E8A6-8845-BD4E-CB4CCA059FC4}" type="datetimeFigureOut">
               <a:rPr lang="en-US" smtClean="0"/>
-              <a:t>8/31/2026</a:t>
+              <a:t>10/9/2026</a:t>
             </a:fld>
             <a:endParaRPr lang="en-US"/>
           </a:p>
@@ -7631,7 +7631,7 @@
           <a:p>
             <a:fld id="{5BCAD085-E8A6-8845-BD4E-CB4CCA059FC4}" type="datetimeFigureOut">
               <a:rPr lang="en-US" smtClean="0"/>
-              <a:t>8/31/2026</a:t>
+              <a:t>10/9/2026</a:t>
             </a:fld>
             <a:endParaRPr lang="en-US"/>
           </a:p>
@@ -7908,7 +7908,7 @@
           <a:p>
             <a:fld id="{5BCAD085-E8A6-8845-BD4E-CB4CCA059FC4}" type="datetimeFigureOut">
               <a:rPr lang="en-US" smtClean="0"/>
-              <a:t>8/31/2026</a:t>
+              <a:t>10/9/2026</a:t>
             </a:fld>
             <a:endParaRPr lang="en-US"/>
           </a:p>
@@ -8161,7 +8161,7 @@
           <a:p>
             <a:fld id="{5BCAD085-E8A6-8845-BD4E-CB4CCA059FC4}" type="datetimeFigureOut">
               <a:rPr lang="en-US" smtClean="0"/>
-              <a:t>8/31/2026</a:t>
+              <a:t>10/9/2026</a:t>
             </a:fld>
             <a:endParaRPr lang="en-US"/>
           </a:p>
@@ -8374,7 +8374,7 @@
           <a:p>
             <a:fld id="{5BCAD085-E8A6-8845-BD4E-CB4CCA059FC4}" type="datetimeFigureOut">
               <a:rPr lang="en-US" smtClean="0"/>
-              <a:t>8/31/2026</a:t>
+              <a:t>10/9/2026</a:t>
             </a:fld>
             <a:endParaRPr lang="en-US"/>
           </a:p>
@@ -9786,8 +9786,8 @@
         </p:nvSpPr>
         <p:spPr>
           <a:xfrm>
-            <a:off x="1389888" y="3502152"/>
-            <a:ext cx="2468880" cy="548640"/>
+            <a:off x="1389888" y="3410712"/>
+            <a:ext cx="2468880" cy="726353"/>
           </a:xfrm>
           <a:prstGeom prst="rect">
             <a:avLst/>
@@ -9806,7 +9806,7 @@
               </a:lnSpc>
             </a:pPr>
             <a:r>
-              <a:rPr sz="1500" b="0" i="0">
+              <a:rPr sz="2000" b="0" i="0" dirty="0">
                 <a:solidFill>
                   <a:srgbClr val="6B7A8F"/>
                 </a:solidFill>
@@ -9824,7 +9824,7 @@
               </a:lnSpc>
             </a:pPr>
             <a:r>
-              <a:rPr sz="1500" b="0" i="0">
+              <a:rPr sz="2000" b="0" i="0" dirty="0" err="1">
                 <a:solidFill>
                   <a:srgbClr val="6B7A8F"/>
                 </a:solidFill>
@@ -9832,7 +9832,18 @@
                 <a:ea typeface="Calibri"/>
                 <a:cs typeface="Calibri"/>
               </a:rPr>
-              <a:t>tonne of CO₂</a:t>
+              <a:t>tonne</a:t>
+            </a:r>
+            <a:r>
+              <a:rPr sz="2000" b="0" i="0" dirty="0">
+                <a:solidFill>
+                  <a:srgbClr val="6B7A8F"/>
+                </a:solidFill>
+                <a:latin typeface="Calibri"/>
+                <a:ea typeface="Calibri"/>
+                <a:cs typeface="Calibri"/>
+              </a:rPr>
+              <a:t> of CO₂</a:t>
             </a:r>
           </a:p>
         </p:txBody>
@@ -9976,8 +9987,8 @@
         </p:nvSpPr>
         <p:spPr>
           <a:xfrm>
-            <a:off x="5504688" y="3502152"/>
-            <a:ext cx="2468880" cy="548640"/>
+            <a:off x="5504688" y="3395007"/>
+            <a:ext cx="2468880" cy="726353"/>
           </a:xfrm>
           <a:prstGeom prst="rect">
             <a:avLst/>
@@ -9996,7 +10007,7 @@
               </a:lnSpc>
             </a:pPr>
             <a:r>
-              <a:rPr sz="1500" b="0" i="0">
+              <a:rPr sz="2000" b="0" i="0" dirty="0">
                 <a:solidFill>
                   <a:srgbClr val="6B7A8F"/>
                 </a:solidFill>
@@ -10014,7 +10025,7 @@
               </a:lnSpc>
             </a:pPr>
             <a:r>
-              <a:rPr sz="1500" b="0" i="0">
+              <a:rPr sz="2000" b="0" i="0" dirty="0" err="1">
                 <a:solidFill>
                   <a:srgbClr val="6B7A8F"/>
                 </a:solidFill>
@@ -10022,7 +10033,18 @@
                 <a:ea typeface="Calibri"/>
                 <a:cs typeface="Calibri"/>
               </a:rPr>
-              <a:t>tonne of CO₂</a:t>
+              <a:t>tonne</a:t>
+            </a:r>
+            <a:r>
+              <a:rPr sz="2000" b="0" i="0" dirty="0">
+                <a:solidFill>
+                  <a:srgbClr val="6B7A8F"/>
+                </a:solidFill>
+                <a:latin typeface="Calibri"/>
+                <a:ea typeface="Calibri"/>
+                <a:cs typeface="Calibri"/>
+              </a:rPr>
+              <a:t> of CO₂</a:t>
             </a:r>
           </a:p>
         </p:txBody>
@@ -10081,7 +10103,7 @@
         <p:spPr>
           <a:xfrm>
             <a:off x="3904488" y="3319272"/>
-            <a:ext cx="1554480" cy="365760"/>
+            <a:ext cx="1554480" cy="276999"/>
           </a:xfrm>
           <a:prstGeom prst="rect">
             <a:avLst/>
@@ -10100,7 +10122,7 @@
               </a:lnSpc>
             </a:pPr>
             <a:r>
-              <a:rPr sz="1400" b="0" i="1">
+              <a:rPr b="0" i="1" dirty="0">
                 <a:solidFill>
                   <a:srgbClr val="6B7A8F"/>
                 </a:solidFill>
@@ -13048,7 +13070,7 @@
         </p:nvSpPr>
         <p:spPr>
           <a:xfrm>
-            <a:off x="566928" y="384048"/>
+            <a:off x="566928" y="353902"/>
             <a:ext cx="11057839" cy="566928"/>
           </a:xfrm>
           <a:prstGeom prst="rect">
@@ -13532,7 +13554,7 @@
         <p:spPr>
           <a:xfrm>
             <a:off x="566928" y="3127248"/>
-            <a:ext cx="3200400" cy="365760"/>
+            <a:ext cx="3200400" cy="276999"/>
           </a:xfrm>
           <a:prstGeom prst="rect">
             <a:avLst/>
@@ -13551,7 +13573,7 @@
               </a:lnSpc>
             </a:pPr>
             <a:r>
-              <a:rPr sz="1600" b="0" i="0">
+              <a:rPr b="0" i="0">
                 <a:solidFill>
                   <a:srgbClr val="11243A"/>
                 </a:solidFill>
@@ -13655,7 +13677,7 @@
         <p:spPr>
           <a:xfrm>
             <a:off x="566928" y="3657600"/>
-            <a:ext cx="3200400" cy="365760"/>
+            <a:ext cx="3200400" cy="276999"/>
           </a:xfrm>
           <a:prstGeom prst="rect">
             <a:avLst/>
@@ -13674,7 +13696,7 @@
               </a:lnSpc>
             </a:pPr>
             <a:r>
-              <a:rPr sz="1600" b="0" i="0">
+              <a:rPr b="0" i="0" dirty="0">
                 <a:solidFill>
                   <a:srgbClr val="11243A"/>
                 </a:solidFill>
@@ -13880,7 +13902,7 @@
         <p:spPr>
           <a:xfrm>
             <a:off x="566928" y="4791456"/>
-            <a:ext cx="3200400" cy="365760"/>
+            <a:ext cx="3200400" cy="276999"/>
           </a:xfrm>
           <a:prstGeom prst="rect">
             <a:avLst/>
@@ -13899,7 +13921,7 @@
               </a:lnSpc>
             </a:pPr>
             <a:r>
-              <a:rPr sz="1600" b="0" i="0">
+              <a:rPr b="0" i="0" dirty="0">
                 <a:solidFill>
                   <a:srgbClr val="11243A"/>
                 </a:solidFill>
@@ -16128,7 +16150,7 @@
         <p:spPr>
           <a:xfrm>
             <a:off x="841247" y="2331720"/>
-            <a:ext cx="4774539" cy="320040"/>
+            <a:ext cx="4774539" cy="276999"/>
           </a:xfrm>
           <a:prstGeom prst="rect">
             <a:avLst/>
@@ -16147,7 +16169,7 @@
               </a:lnSpc>
             </a:pPr>
             <a:r>
-              <a:rPr sz="1500" b="0" i="1">
+              <a:rPr b="0" i="1" dirty="0">
                 <a:solidFill>
                   <a:srgbClr val="0E7C7B"/>
                 </a:solidFill>
@@ -16188,15 +16210,37 @@
               </a:lnSpc>
             </a:pPr>
             <a:r>
-              <a:rPr sz="1500" b="0" i="0">
-                <a:solidFill>
-                  <a:srgbClr val="11243A"/>
-                </a:solidFill>
-                <a:latin typeface="Calibri"/>
-                <a:ea typeface="Calibri"/>
-                <a:cs typeface="Calibri"/>
-              </a:rPr>
-              <a:t>A supervisory board checks whether the seller's pledge is below business-as-usual. If yes, trade is allowed. If not, the pledge generates hot air, and each individual project must be audited for additionality.</a:t>
+              <a:rPr sz="1500" b="0" i="0" dirty="0">
+                <a:solidFill>
+                  <a:srgbClr val="11243A"/>
+                </a:solidFill>
+                <a:latin typeface="Calibri"/>
+                <a:ea typeface="Calibri"/>
+                <a:cs typeface="Calibri"/>
+              </a:rPr>
+              <a:t>A supervisory board checks whether the seller's pledge is below business-as-usual. If yes, trade is allowed. If not, the pledge generates hot air, and each individual project must be audited for </a:t>
+            </a:r>
+            <a:r>
+              <a:rPr sz="1500" b="0" i="0" dirty="0" err="1">
+                <a:solidFill>
+                  <a:srgbClr val="11243A"/>
+                </a:solidFill>
+                <a:latin typeface="Calibri"/>
+                <a:ea typeface="Calibri"/>
+                <a:cs typeface="Calibri"/>
+              </a:rPr>
+              <a:t>additionality</a:t>
+            </a:r>
+            <a:r>
+              <a:rPr sz="1500" b="0" i="0" dirty="0">
+                <a:solidFill>
+                  <a:srgbClr val="11243A"/>
+                </a:solidFill>
+                <a:latin typeface="Calibri"/>
+                <a:ea typeface="Calibri"/>
+                <a:cs typeface="Calibri"/>
+              </a:rPr>
+              <a:t>.</a:t>
             </a:r>
           </a:p>
         </p:txBody>
@@ -16402,7 +16446,7 @@
         <p:spPr>
           <a:xfrm>
             <a:off x="6575907" y="2331720"/>
-            <a:ext cx="4774539" cy="230832"/>
+            <a:ext cx="4774539" cy="276999"/>
           </a:xfrm>
           <a:prstGeom prst="rect">
             <a:avLst/>
@@ -16421,7 +16465,7 @@
               </a:lnSpc>
             </a:pPr>
             <a:r>
-              <a:rPr sz="1500" b="0" i="1" dirty="0">
+              <a:rPr b="0" i="1" dirty="0">
                 <a:solidFill>
                   <a:srgbClr val="0E7C7B"/>
                 </a:solidFill>
@@ -16432,7 +16476,7 @@
               <a:t>“Just cap the </a:t>
             </a:r>
             <a:r>
-              <a:rPr sz="1500" b="0" i="1" dirty="0" smtClean="0">
+              <a:rPr b="0" i="1" dirty="0" smtClean="0">
                 <a:solidFill>
                   <a:srgbClr val="0E7C7B"/>
                 </a:solidFill>
@@ -16443,7 +16487,7 @@
               <a:t>quantity</a:t>
             </a:r>
             <a:r>
-              <a:rPr lang="fr-FR" sz="1500" i="1" dirty="0">
+              <a:rPr lang="fr-FR" i="1" dirty="0">
                 <a:solidFill>
                   <a:srgbClr val="0E7C7B"/>
                 </a:solidFill>
@@ -16454,7 +16498,7 @@
               <a:t> </a:t>
             </a:r>
             <a:r>
-              <a:rPr lang="fr-FR" sz="1500" i="1" dirty="0" smtClean="0">
+              <a:rPr lang="fr-FR" i="1" dirty="0" smtClean="0">
                 <a:solidFill>
                   <a:srgbClr val="0E7C7B"/>
                 </a:solidFill>
@@ -16465,7 +16509,7 @@
               <a:t>of </a:t>
             </a:r>
             <a:r>
-              <a:rPr lang="fr-FR" sz="1500" i="1" dirty="0" err="1" smtClean="0">
+              <a:rPr lang="fr-FR" i="1" dirty="0" err="1" smtClean="0">
                 <a:solidFill>
                   <a:srgbClr val="0E7C7B"/>
                 </a:solidFill>
@@ -16476,7 +16520,7 @@
               <a:t>ITMOs</a:t>
             </a:r>
             <a:r>
-              <a:rPr sz="1500" b="0" i="1" dirty="0" smtClean="0">
+              <a:rPr b="0" i="1" dirty="0" smtClean="0">
                 <a:solidFill>
                   <a:srgbClr val="0E7C7B"/>
                 </a:solidFill>
@@ -16486,7 +16530,7 @@
               </a:rPr>
               <a:t>”</a:t>
             </a:r>
-            <a:endParaRPr sz="1500" b="0" i="1" dirty="0">
+            <a:endParaRPr b="0" i="1" dirty="0">
               <a:solidFill>
                 <a:srgbClr val="0E7C7B"/>
               </a:solidFill>
@@ -19896,7 +19940,7 @@
         <p:spPr>
           <a:xfrm>
             <a:off x="566928" y="384048"/>
-            <a:ext cx="11057839" cy="566928"/>
+            <a:ext cx="11057839" cy="492443"/>
           </a:xfrm>
           <a:prstGeom prst="rect">
             <a:avLst/>
@@ -19915,16 +19959,24 @@
               </a:lnSpc>
             </a:pPr>
             <a:r>
-              <a:rPr sz="3200" b="1" i="0">
-                <a:solidFill>
-                  <a:srgbClr val="11243A"/>
-                </a:solidFill>
-                <a:latin typeface="Calibri"/>
-                <a:ea typeface="Calibri"/>
-                <a:cs typeface="Calibri"/>
-              </a:rPr>
-              <a:t>Where we are going</a:t>
-            </a:r>
+              <a:rPr lang="fr-FR" sz="3200" b="1" i="0" dirty="0" err="1" smtClean="0">
+                <a:solidFill>
+                  <a:srgbClr val="11243A"/>
+                </a:solidFill>
+                <a:latin typeface="Calibri"/>
+                <a:ea typeface="Calibri"/>
+                <a:cs typeface="Calibri"/>
+              </a:rPr>
+              <a:t>Outline</a:t>
+            </a:r>
+            <a:endParaRPr sz="3200" b="1" i="0" dirty="0">
+              <a:solidFill>
+                <a:srgbClr val="11243A"/>
+              </a:solidFill>
+              <a:latin typeface="Calibri"/>
+              <a:ea typeface="Calibri"/>
+              <a:cs typeface="Calibri"/>
+            </a:endParaRPr>
           </a:p>
         </p:txBody>
       </p:sp>
@@ -28538,7 +28590,7 @@
         <p:spPr>
           <a:xfrm>
             <a:off x="566928" y="384048"/>
-            <a:ext cx="11057839" cy="566928"/>
+            <a:ext cx="11057839" cy="492443"/>
           </a:xfrm>
           <a:prstGeom prst="rect">
             <a:avLst/>
@@ -28557,15 +28609,37 @@
               </a:lnSpc>
             </a:pPr>
             <a:r>
-              <a:rPr sz="3200" b="1" i="0">
-                <a:solidFill>
-                  <a:srgbClr val="11243A"/>
-                </a:solidFill>
-                <a:latin typeface="Calibri"/>
-                <a:ea typeface="Calibri"/>
-                <a:cs typeface="Calibri"/>
-              </a:rPr>
-              <a:t>Is this remotely feasible?</a:t>
+              <a:rPr sz="3200" b="1" i="0" dirty="0">
+                <a:solidFill>
+                  <a:srgbClr val="11243A"/>
+                </a:solidFill>
+                <a:latin typeface="Calibri"/>
+                <a:ea typeface="Calibri"/>
+                <a:cs typeface="Calibri"/>
+              </a:rPr>
+              <a:t>Is this </a:t>
+            </a:r>
+            <a:r>
+              <a:rPr sz="3200" b="1" i="0" dirty="0" smtClean="0">
+                <a:solidFill>
+                  <a:srgbClr val="11243A"/>
+                </a:solidFill>
+                <a:latin typeface="Calibri"/>
+                <a:ea typeface="Calibri"/>
+                <a:cs typeface="Calibri"/>
+              </a:rPr>
+              <a:t>feasible</a:t>
+            </a:r>
+            <a:r>
+              <a:rPr sz="3200" b="1" i="0" dirty="0">
+                <a:solidFill>
+                  <a:srgbClr val="11243A"/>
+                </a:solidFill>
+                <a:latin typeface="Calibri"/>
+                <a:ea typeface="Calibri"/>
+                <a:cs typeface="Calibri"/>
+              </a:rPr>
+              <a:t>?</a:t>
             </a:r>
           </a:p>
         </p:txBody>
@@ -46968,7 +47042,18 @@
                 <a:ea typeface="Calibri"/>
                 <a:cs typeface="Calibri"/>
               </a:rPr>
-              <a:t>%</a:t>
+              <a:t>% in </a:t>
+            </a:r>
+            <a:r>
+              <a:rPr lang="fr-FR" sz="1900" b="1" i="0" dirty="0" err="1" smtClean="0">
+                <a:solidFill>
+                  <a:srgbClr val="D9532C"/>
+                </a:solidFill>
+                <a:latin typeface="Calibri"/>
+                <a:ea typeface="Calibri"/>
+                <a:cs typeface="Calibri"/>
+              </a:rPr>
+              <a:t>grants</a:t>
             </a:r>
             <a:endParaRPr sz="1900" b="1" i="0" dirty="0">
               <a:solidFill>
